--- a/catalog/samples/chevron_steps.pptx
+++ b/catalog/samples/chevron_steps.pptx
@@ -1272,7 +1272,7 @@
           </a:p>
           <a:p>
             <a:r>
-              <a:t>  "template_sha256": "d38e5b9c5300d5f37e2e944e19b0886eefe86c895d06ac893c1850d963c08a97"</a:t>
+              <a:t>  "template_sha256": "6f98cf501257f177271a97c27b427ea70221ecf9705728718b6fef83f5a3f134"</a:t>
             </a:r>
           </a:p>
           <a:p>
